--- a/media/resources/files/ButunSandardyJanaOnduktardyKoboytuuBoluu-10-100-1000-KazynaIzdoo_ZMjMBEM.pptx
+++ b/media/resources/files/ButunSandardyJanaOnduktardyKoboytuuBoluu-10-100-1000-KazynaIzdoo_ZMjMBEM.pptx
@@ -17514,7 +17514,7 @@
                 <a:ea typeface="+mn-ea"/>
                 <a:cs typeface="+mn-cs"/>
               </a:rPr>
-              <a:t>Турдуу пикирлер учун ыраазычылык билдиребиз.</a:t>
+              <a:t>Түрдүү пикирлер үчүн ыраазычылык билдиребиз.</a:t>
             </a:r>
           </a:p>
           <a:p>

--- a/media/resources/files/ButunSandardyJanaOnduktardyKoboytuuBoluu-10-100-1000-KazynaIzdoo_ZMjMBEM.pptx
+++ b/media/resources/files/ButunSandardyJanaOnduktardyKoboytuuBoluu-10-100-1000-KazynaIzdoo_ZMjMBEM.pptx
@@ -3853,7 +3853,7 @@
             </a:r>
             <a:r>
               <a:rPr lang="ky-KG" sz="2400" dirty="0"/>
-              <a:t>Унутуп калбаш учун</a:t>
+              <a:t>Унутуп калбаш үчүн</a:t>
             </a:r>
             <a:endParaRPr lang="en-US" sz="2400" dirty="0"/>
           </a:p>
@@ -4461,7 +4461,7 @@
             <a:pPr algn="ctr"/>
             <a:r>
               <a:rPr lang="en-GB" sz="7200" dirty="0"/>
-              <a:t>0.517</a:t>
+              <a:t>0,517</a:t>
             </a:r>
             <a:endParaRPr lang="en-GB" sz="3200" dirty="0"/>
           </a:p>
@@ -4498,7 +4498,7 @@
             <a:pPr algn="ctr"/>
             <a:r>
               <a:rPr lang="en-GB" sz="8800" dirty="0"/>
-              <a:t>0.571 ÷ 1000</a:t>
+              <a:t>0,571 ÷ 1000</a:t>
             </a:r>
             <a:endParaRPr lang="en-GB" sz="4000" dirty="0"/>
           </a:p>
@@ -4983,7 +4983,7 @@
             <a:pPr algn="ctr"/>
             <a:r>
               <a:rPr lang="en-GB" sz="8800" dirty="0"/>
-              <a:t>57.1 ÷ 100</a:t>
+              <a:t>57,1 ÷ 100</a:t>
             </a:r>
             <a:endParaRPr lang="en-GB" sz="4000" dirty="0"/>
           </a:p>
@@ -5468,7 +5468,7 @@
             <a:pPr algn="ctr"/>
             <a:r>
               <a:rPr lang="en-GB" sz="8800" dirty="0"/>
-              <a:t>5.71 ÷ 1000</a:t>
+              <a:t>5,71 ÷ 1000</a:t>
             </a:r>
             <a:endParaRPr lang="en-GB" sz="4000" dirty="0"/>
           </a:p>
@@ -5916,7 +5916,7 @@
             <a:pPr algn="ctr"/>
             <a:r>
               <a:rPr lang="en-GB" sz="7200" dirty="0"/>
-              <a:t>0.00571</a:t>
+              <a:t>0,00571</a:t>
             </a:r>
             <a:endParaRPr lang="en-GB" sz="3200" dirty="0"/>
           </a:p>
@@ -6444,7 +6444,7 @@
             <a:pPr algn="ctr"/>
             <a:r>
               <a:rPr lang="en-GB" sz="8800" dirty="0"/>
-              <a:t>0.571 × 100</a:t>
+              <a:t>0,571 × 100</a:t>
             </a:r>
             <a:endParaRPr lang="en-GB" sz="4000" dirty="0"/>
           </a:p>
@@ -6892,7 +6892,7 @@
             <a:pPr algn="ctr"/>
             <a:r>
               <a:rPr lang="en-GB" sz="7200" dirty="0"/>
-              <a:t>5.17</a:t>
+              <a:t>5,17</a:t>
             </a:r>
             <a:endParaRPr lang="en-GB" sz="3200" dirty="0"/>
           </a:p>
@@ -6929,7 +6929,7 @@
             <a:pPr algn="ctr"/>
             <a:r>
               <a:rPr lang="en-GB" sz="8800" dirty="0"/>
-              <a:t>5.17 × 10</a:t>
+              <a:t>5,17 × 10</a:t>
             </a:r>
             <a:endParaRPr lang="en-GB" sz="4000" dirty="0"/>
           </a:p>
@@ -7377,7 +7377,7 @@
             <a:pPr algn="ctr"/>
             <a:r>
               <a:rPr lang="en-GB" sz="7200" dirty="0"/>
-              <a:t>51.7</a:t>
+              <a:t>51,7</a:t>
             </a:r>
             <a:endParaRPr lang="en-GB" sz="3200" dirty="0"/>
           </a:p>
@@ -7414,7 +7414,7 @@
             <a:pPr algn="ctr"/>
             <a:r>
               <a:rPr lang="en-GB" sz="8800" dirty="0"/>
-              <a:t>5.71 × 100</a:t>
+              <a:t>5,71 × 100</a:t>
             </a:r>
             <a:endParaRPr lang="en-GB" sz="4000" dirty="0"/>
           </a:p>
@@ -8347,7 +8347,7 @@
             <a:pPr algn="ctr"/>
             <a:r>
               <a:rPr lang="en-GB" sz="7200" dirty="0"/>
-              <a:t>0.00517</a:t>
+              <a:t>0,00517</a:t>
             </a:r>
             <a:endParaRPr lang="en-GB" sz="3200" dirty="0"/>
           </a:p>
@@ -8384,7 +8384,7 @@
             <a:pPr algn="ctr"/>
             <a:r>
               <a:rPr lang="en-GB" sz="8800" dirty="0"/>
-              <a:t>51.7 × 100</a:t>
+              <a:t>51,7 × 100</a:t>
             </a:r>
             <a:endParaRPr lang="en-GB" sz="4000" dirty="0"/>
           </a:p>
@@ -9272,7 +9272,7 @@
                           <a:ea typeface="+mn-ea"/>
                           <a:cs typeface="+mn-cs"/>
                         </a:rPr>
-                        <a:t>5.71</a:t>
+                        <a:t>5,71</a:t>
                       </a:r>
                     </a:p>
                   </a:txBody>
@@ -9415,7 +9415,7 @@
                           <a:ea typeface="+mn-ea"/>
                           <a:cs typeface="+mn-cs"/>
                         </a:rPr>
-                        <a:t>0.000571</a:t>
+                        <a:t>0,000571</a:t>
                       </a:r>
                       <a:endParaRPr kumimoji="0" lang="en-GB" sz="2800" b="0" i="0" u="none" strike="noStrike" kern="1200" cap="none" spc="0" normalizeH="0" baseline="0" noProof="0" dirty="0">
                         <a:ln>
@@ -9572,7 +9572,7 @@
                           <a:ea typeface="+mn-ea"/>
                           <a:cs typeface="+mn-cs"/>
                         </a:rPr>
-                        <a:t>51.7</a:t>
+                        <a:t>51,7</a:t>
                       </a:r>
                     </a:p>
                   </a:txBody>
@@ -9722,7 +9722,7 @@
                           <a:ea typeface="+mn-ea"/>
                           <a:cs typeface="+mn-cs"/>
                         </a:rPr>
-                        <a:t>0.571</a:t>
+                        <a:t>0,571</a:t>
                       </a:r>
                     </a:p>
                   </a:txBody>
@@ -9861,7 +9861,7 @@
                           <a:ea typeface="+mn-ea"/>
                           <a:cs typeface="+mn-cs"/>
                         </a:rPr>
-                        <a:t>0.00517</a:t>
+                        <a:t>0,00517</a:t>
                       </a:r>
                       <a:endParaRPr kumimoji="0" lang="en-GB" sz="2800" b="0" i="0" u="none" strike="noStrike" kern="1200" cap="none" spc="0" normalizeH="0" baseline="0" noProof="0" dirty="0">
                         <a:ln>
@@ -10597,7 +10597,7 @@
                           <a:ea typeface="+mn-ea"/>
                           <a:cs typeface="+mn-cs"/>
                         </a:rPr>
-                        <a:t>0.00571</a:t>
+                        <a:t>0,00571</a:t>
                       </a:r>
                     </a:p>
                   </a:txBody>
@@ -10890,7 +10890,7 @@
                           <a:ea typeface="+mn-ea"/>
                           <a:cs typeface="+mn-cs"/>
                         </a:rPr>
-                        <a:t>0.0517</a:t>
+                        <a:t>0,0517</a:t>
                       </a:r>
                     </a:p>
                   </a:txBody>
@@ -11033,7 +11033,7 @@
                           <a:ea typeface="+mn-ea"/>
                           <a:cs typeface="+mn-cs"/>
                         </a:rPr>
-                        <a:t>0.517</a:t>
+                        <a:t>0,517</a:t>
                       </a:r>
                     </a:p>
                   </a:txBody>
@@ -11176,7 +11176,7 @@
                           <a:ea typeface="+mn-ea"/>
                           <a:cs typeface="+mn-cs"/>
                         </a:rPr>
-                        <a:t>5.17</a:t>
+                        <a:t>5,17</a:t>
                       </a:r>
                     </a:p>
                   </a:txBody>
@@ -11319,7 +11319,7 @@
                           <a:ea typeface="+mn-ea"/>
                           <a:cs typeface="+mn-cs"/>
                         </a:rPr>
-                        <a:t>57.1</a:t>
+                        <a:t>57,1</a:t>
                       </a:r>
                     </a:p>
                   </a:txBody>
@@ -18169,7 +18169,7 @@
             <a:pPr algn="ctr"/>
             <a:r>
               <a:rPr lang="en-GB" sz="8800" dirty="0"/>
-              <a:t>5.17 ÷ 100</a:t>
+              <a:t>5,17 ÷ 100</a:t>
             </a:r>
             <a:endParaRPr lang="en-GB" sz="4000" dirty="0"/>
           </a:p>
@@ -18617,7 +18617,7 @@
             <a:pPr algn="ctr"/>
             <a:r>
               <a:rPr lang="en-GB" sz="7200" dirty="0"/>
-              <a:t>0.0517</a:t>
+              <a:t>0,0517</a:t>
             </a:r>
             <a:endParaRPr lang="en-GB" sz="3200" dirty="0"/>
           </a:p>
@@ -18654,7 +18654,7 @@
             <a:pPr algn="ctr"/>
             <a:r>
               <a:rPr lang="en-GB" sz="8800" dirty="0"/>
-              <a:t>0.571 × 10</a:t>
+              <a:t>0,571 × 10</a:t>
             </a:r>
             <a:endParaRPr lang="en-GB" sz="4000" dirty="0"/>
           </a:p>
@@ -19102,7 +19102,7 @@
             <a:pPr algn="ctr"/>
             <a:r>
               <a:rPr lang="en-GB" sz="7200" dirty="0"/>
-              <a:t>5.71</a:t>
+              <a:t>5,71</a:t>
             </a:r>
             <a:endParaRPr lang="en-GB" sz="3200" dirty="0"/>
           </a:p>
@@ -19139,7 +19139,7 @@
             <a:pPr algn="ctr"/>
             <a:r>
               <a:rPr lang="en-GB" sz="8800" dirty="0"/>
-              <a:t>5.17 ÷ 1000</a:t>
+              <a:t>5,17 ÷ 1000</a:t>
             </a:r>
             <a:endParaRPr lang="en-GB" sz="4000" dirty="0"/>
           </a:p>
@@ -19587,7 +19587,7 @@
             <a:pPr algn="ctr"/>
             <a:r>
               <a:rPr lang="en-GB" sz="7200" dirty="0"/>
-              <a:t>0.000571</a:t>
+              <a:t>0,000571</a:t>
             </a:r>
             <a:endParaRPr lang="en-GB" sz="3200" dirty="0"/>
           </a:p>
@@ -19624,7 +19624,7 @@
             <a:pPr algn="ctr"/>
             <a:r>
               <a:rPr lang="en-GB" sz="8800" dirty="0"/>
-              <a:t>57.1 × 1000</a:t>
+              <a:t>57,1 × 1000</a:t>
             </a:r>
             <a:endParaRPr lang="en-GB" sz="4000" dirty="0"/>
           </a:p>
@@ -20072,7 +20072,7 @@
             <a:pPr algn="ctr"/>
             <a:r>
               <a:rPr lang="en-GB" sz="7200"/>
-              <a:t>57.1</a:t>
+              <a:t>57,1</a:t>
             </a:r>
             <a:endParaRPr lang="en-GB" sz="3200" dirty="0"/>
           </a:p>
@@ -20109,7 +20109,7 @@
             <a:pPr algn="ctr"/>
             <a:r>
               <a:rPr lang="en-GB" sz="8800" dirty="0"/>
-              <a:t>5.17 × 100</a:t>
+              <a:t>5,17 × 100</a:t>
             </a:r>
             <a:endParaRPr lang="en-GB" sz="4000" dirty="0"/>
           </a:p>
@@ -20557,7 +20557,7 @@
             <a:pPr algn="ctr"/>
             <a:r>
               <a:rPr lang="en-GB" sz="7200" dirty="0"/>
-              <a:t>0.571</a:t>
+              <a:t>0,571</a:t>
             </a:r>
             <a:endParaRPr lang="en-GB" sz="3200" dirty="0"/>
           </a:p>

--- a/media/resources/files/ButunSandardyJanaOnduktardyKoboytuuBoluu-10-100-1000-KazynaIzdoo_ZMjMBEM.pptx
+++ b/media/resources/files/ButunSandardyJanaOnduktardyKoboytuuBoluu-10-100-1000-KazynaIzdoo_ZMjMBEM.pptx
@@ -5431,7 +5431,7 @@
             <a:pPr algn="ctr"/>
             <a:r>
               <a:rPr lang="en-GB" sz="7200" dirty="0"/>
-              <a:t>57100</a:t>
+              <a:t>57 100</a:t>
             </a:r>
             <a:endParaRPr lang="en-GB" sz="3200" dirty="0"/>
           </a:p>
@@ -5916,7 +5916,7 @@
             <a:pPr algn="ctr"/>
             <a:r>
               <a:rPr lang="en-GB" sz="7200" dirty="0"/>
-              <a:t>0,00571</a:t>
+              <a:t>0,00 571</a:t>
             </a:r>
             <a:endParaRPr lang="en-GB" sz="3200" dirty="0"/>
           </a:p>
@@ -7899,7 +7899,7 @@
             <a:pPr algn="ctr"/>
             <a:r>
               <a:rPr lang="en-GB" sz="8800" dirty="0"/>
-              <a:t>571000 ÷ 100</a:t>
+              <a:t>571 000 ÷ 100</a:t>
             </a:r>
             <a:endParaRPr lang="en-GB" sz="4000" dirty="0"/>
           </a:p>
@@ -8347,7 +8347,7 @@
             <a:pPr algn="ctr"/>
             <a:r>
               <a:rPr lang="en-GB" sz="7200" dirty="0"/>
-              <a:t>0,00517</a:t>
+              <a:t>0,00 517</a:t>
             </a:r>
             <a:endParaRPr lang="en-GB" sz="3200" dirty="0"/>
           </a:p>
@@ -9415,7 +9415,7 @@
                           <a:ea typeface="+mn-ea"/>
                           <a:cs typeface="+mn-cs"/>
                         </a:rPr>
-                        <a:t>0,000571</a:t>
+                        <a:t>0,000 571</a:t>
                       </a:r>
                       <a:endParaRPr kumimoji="0" lang="en-GB" sz="2800" b="0" i="0" u="none" strike="noStrike" kern="1200" cap="none" spc="0" normalizeH="0" baseline="0" noProof="0" dirty="0">
                         <a:ln>
@@ -9861,7 +9861,7 @@
                           <a:ea typeface="+mn-ea"/>
                           <a:cs typeface="+mn-cs"/>
                         </a:rPr>
-                        <a:t>0,00517</a:t>
+                        <a:t>0,00 517</a:t>
                       </a:r>
                       <a:endParaRPr kumimoji="0" lang="en-GB" sz="2800" b="0" i="0" u="none" strike="noStrike" kern="1200" cap="none" spc="0" normalizeH="0" baseline="0" noProof="0" dirty="0">
                         <a:ln>
@@ -10018,7 +10018,7 @@
                           <a:ea typeface="+mn-ea"/>
                           <a:cs typeface="+mn-cs"/>
                         </a:rPr>
-                        <a:t>57100</a:t>
+                        <a:t>57 100</a:t>
                       </a:r>
                     </a:p>
                   </a:txBody>
@@ -10311,7 +10311,7 @@
                           <a:ea typeface="+mn-ea"/>
                           <a:cs typeface="+mn-cs"/>
                         </a:rPr>
-                        <a:t>517000</a:t>
+                        <a:t>517 000</a:t>
                       </a:r>
                     </a:p>
                   </a:txBody>
@@ -10597,7 +10597,7 @@
                           <a:ea typeface="+mn-ea"/>
                           <a:cs typeface="+mn-cs"/>
                         </a:rPr>
-                        <a:t>0,00571</a:t>
+                        <a:t>0,00 571</a:t>
                       </a:r>
                     </a:p>
                   </a:txBody>
@@ -18132,7 +18132,7 @@
             <a:pPr algn="ctr"/>
             <a:r>
               <a:rPr lang="en-GB" sz="7200" dirty="0"/>
-              <a:t>517000</a:t>
+              <a:t>517 000</a:t>
             </a:r>
             <a:endParaRPr lang="en-GB" sz="3200" dirty="0"/>
           </a:p>
@@ -19587,7 +19587,7 @@
             <a:pPr algn="ctr"/>
             <a:r>
               <a:rPr lang="en-GB" sz="7200" dirty="0"/>
-              <a:t>0,000571</a:t>
+              <a:t>0,000 571</a:t>
             </a:r>
             <a:endParaRPr lang="en-GB" sz="3200" dirty="0"/>
           </a:p>
